--- a/BACKUP&RECOVERY/09장/09장_ARCHIVELOG_복구_전체DF_UNDO_아카이브결손.pptx
+++ b/BACKUP&RECOVERY/09장/09장_ARCHIVELOG_복구_전체DF_UNDO_아카이브결손.pptx
@@ -6547,7 +6547,7 @@
                 <a:latin typeface="Consolas"/>
                 <a:ea typeface="Consolas"/>
               </a:rPr>
-              <a:t>SYS@orcl&gt; !rm -f /u01/app/oracle/oradata/ORCL/undotbs01.dbf</a:t>
+              <a:t>SYS@orcl&gt; ALTER SYSTEM FLUSH BUFFER_CACHE;</a:t>
             </a:r>
           </a:p>
           <a:p>
@@ -6564,7 +6564,7 @@
                 <a:latin typeface="Consolas"/>
                 <a:ea typeface="Consolas"/>
               </a:rPr>
-              <a:t>SYS@orcl&gt; ALTER SYSTEM FLUSH BUFFER_CACHE;</a:t>
+              <a:t>SYS@orcl&gt; !rm -f /u01/app/oracle/oradata/orcl/undotbs01.dbf</a:t>
             </a:r>
           </a:p>
           <a:p>
@@ -6717,7 +6717,7 @@
                 <a:latin typeface="Consolas"/>
                 <a:ea typeface="Consolas"/>
               </a:rPr>
-              <a:t>ORA-01110: data file 4: '/u01/app/oracle/oradata/ORCL/undotbs01.dbf'</a:t>
+              <a:t>ORA-01110: data file 4: '/u01/app/oracle/oradata/orcl/undotbs01.dbf'</a:t>
             </a:r>
           </a:p>
           <a:p>
@@ -7254,7 +7254,7 @@
                 <a:latin typeface="Consolas"/>
                 <a:ea typeface="Consolas"/>
               </a:rPr>
-              <a:t>  2    DATAFILE '/u01/app/oracle/oradata/ORCL/undotbs02.dbf' SIZE 300M;</a:t>
+              <a:t>  2    DATAFILE '/u01/app/oracle/oradata/orcl/undotbs02.dbf' SIZE 300M;</a:t>
             </a:r>
           </a:p>
           <a:p>
@@ -8168,7 +8168,7 @@
                 <a:latin typeface="Consolas"/>
                 <a:ea typeface="Consolas"/>
               </a:rPr>
-              <a:t>log_archive_dest_1    string   LOCATION=/u02/arch1 MANDATORY</a:t>
+              <a:t>log_archive_dest_1    string   LOCATION=/home/oracle/arch1 MANDATORY</a:t>
             </a:r>
           </a:p>
           <a:p>
@@ -8304,7 +8304,7 @@
                 <a:latin typeface="Consolas"/>
                 <a:ea typeface="Consolas"/>
               </a:rPr>
-              <a:t>         1 /u02/arch1       VALID     MANDATORY</a:t>
+              <a:t>         1 /home/oracle/arch1       VALID     MANDATORY</a:t>
             </a:r>
           </a:p>
           <a:p>
@@ -8994,7 +8994,7 @@
                 <a:latin typeface="Consolas"/>
                 <a:ea typeface="Consolas"/>
               </a:rPr>
-              <a:t>/u03/arch2/1_38_1200530011.dbf</a:t>
+              <a:t>/u03/arch2/arch_1_38_1200533800.arc</a:t>
             </a:r>
           </a:p>
           <a:p>
@@ -9976,7 +9976,7 @@
                 <a:latin typeface="Consolas"/>
                 <a:ea typeface="Consolas"/>
               </a:rPr>
-              <a:t>/u01/app/oracle/oradata/ORCL/redo03.log</a:t>
+              <a:t>/u01/app/oracle/oradata/orcl/redo03.log</a:t>
             </a:r>
           </a:p>
           <a:p>
@@ -10414,7 +10414,7 @@
                 <a:latin typeface="Consolas"/>
                 <a:ea typeface="Consolas"/>
               </a:rPr>
-              <a:t>        42 /u01/app/oracle/oradata/ORCL/redo03.log</a:t>
+              <a:t>        42 /u01/app/oracle/oradata/orcl/redo03.log</a:t>
             </a:r>
           </a:p>
           <a:p>
@@ -10431,7 +10431,7 @@
                 <a:latin typeface="Consolas"/>
                 <a:ea typeface="Consolas"/>
               </a:rPr>
-              <a:t>        43 /u01/app/oracle/oradata/ORCL/redo04.log</a:t>
+              <a:t>        43 /u01/app/oracle/oradata/orcl/redo04.log</a:t>
             </a:r>
           </a:p>
         </p:txBody>
@@ -11545,7 +11545,7 @@
                 <a:latin typeface="Consolas"/>
                 <a:ea typeface="Consolas"/>
               </a:rPr>
-              <a:t>[oracle@oel7v9r1 ~]$ sqlplus hr/hr@orcl</a:t>
+              <a:t>[oracle@oel7v9r1 ~]$ sqlplus hr/hr</a:t>
             </a:r>
           </a:p>
           <a:p>
@@ -11630,7 +11630,7 @@
                 <a:latin typeface="Consolas"/>
                 <a:ea typeface="Consolas"/>
               </a:rPr>
-              <a:t>         1 /u02/arch1       ERROR   ORA-19809: limit exceeded</a:t>
+              <a:t>         1 /home/oracle/arch1       ERROR   ORA-19809: limit exceeded</a:t>
             </a:r>
           </a:p>
           <a:p>
@@ -16202,7 +16202,7 @@
                 <a:latin typeface="Consolas"/>
                 <a:ea typeface="Consolas"/>
               </a:rPr>
-              <a:t>ORA-01110: data file 1: '/u01/app/oracle/oradata/ORCL/system01.dbf'</a:t>
+              <a:t>ORA-01110: data file 1: '/u01/app/oracle/oradata/orcl/system01.dbf'</a:t>
             </a:r>
           </a:p>
           <a:p>
@@ -16589,7 +16589,7 @@
                 <a:latin typeface="Consolas"/>
                 <a:ea typeface="Consolas"/>
               </a:rPr>
-              <a:t>SYS@orcl&gt; !cp -p /home/oracle/backup/ch09/*.dbf /u01/app/oracle/oradata/ORCL/</a:t>
+              <a:t>SYS@orcl&gt; !cp -p /home/oracle/backup/ch09/*.dbf /u01/app/oracle/oradata/orcl/</a:t>
             </a:r>
           </a:p>
           <a:p>
@@ -16691,7 +16691,7 @@
                 <a:latin typeface="Consolas"/>
                 <a:ea typeface="Consolas"/>
               </a:rPr>
-              <a:t>ORA-00289: suggestion : /u02/arch1/1_34_1200530011.dbf</a:t>
+              <a:t>ORA-00289: suggestion : /home/oracle/arch1/arch_1_34_1200533800.arc</a:t>
             </a:r>
           </a:p>
           <a:p>
@@ -17095,7 +17095,7 @@
                 <a:latin typeface="Consolas"/>
                 <a:ea typeface="Consolas"/>
               </a:rPr>
-              <a:t>  2         ' TO ''' || REPLACE(name, '/u01/app/oracle/oradata/ORCL',</a:t>
+              <a:t>  2         ' TO ''' || REPLACE(name, '/u01/app/oracle/oradata/orcl',</a:t>
             </a:r>
           </a:p>
           <a:p>
@@ -17112,7 +17112,7 @@
                 <a:latin typeface="Consolas"/>
                 <a:ea typeface="Consolas"/>
               </a:rPr>
-              <a:t>  3         '/u02/oradata/ORCL') || ''';'</a:t>
+              <a:t>  3         '/u02/oradata/orcl') || ''';'</a:t>
             </a:r>
           </a:p>
           <a:p>
